--- a/pre-analysis/output_prices/slides/CBAM_focus.pptx
+++ b/pre-analysis/output_prices/slides/CBAM_focus.pptx
@@ -4192,7 +4192,7 @@
                           </a:solidFill>
                           <a:latin typeface="Calibri"/>
                         </a:rPr>
-                        <a:t>60</a:t>
+                        <a:t>55</a:t>
                       </a:r>
                     </a:p>
                   </a:txBody>
@@ -4355,7 +4355,7 @@
                           </a:solidFill>
                           <a:latin typeface="Calibri"/>
                         </a:rPr>
-                        <a:t>37</a:t>
+                        <a:t>33</a:t>
                       </a:r>
                     </a:p>
                   </a:txBody>
@@ -4518,7 +4518,7 @@
                           </a:solidFill>
                           <a:latin typeface="Calibri"/>
                         </a:rPr>
-                        <a:t>87</a:t>
+                        <a:t>79</a:t>
                       </a:r>
                     </a:p>
                   </a:txBody>
@@ -4681,7 +4681,7 @@
                           </a:solidFill>
                           <a:latin typeface="Calibri"/>
                         </a:rPr>
-                        <a:t>76</a:t>
+                        <a:t>69</a:t>
                       </a:r>
                     </a:p>
                   </a:txBody>
@@ -4844,7 +4844,7 @@
                           </a:solidFill>
                           <a:latin typeface="Calibri"/>
                         </a:rPr>
-                        <a:t>45</a:t>
+                        <a:t>40</a:t>
                       </a:r>
                     </a:p>
                   </a:txBody>
